--- a/PPT/OOP.pptx
+++ b/PPT/OOP.pptx
@@ -326,7 +326,7 @@
             <a:fld id="{1D8BD707-D9CF-40AE-B4C6-C98DA3205C09}" type="datetimeFigureOut">
               <a:rPr lang="en-US" smtClean="0"/>
               <a:pPr/>
-              <a:t>7/3/2026</a:t>
+              <a:t>7/10/2026</a:t>
             </a:fld>
             <a:endParaRPr lang="en-US"/>
           </a:p>
@@ -491,7 +491,7 @@
             <a:fld id="{1D8BD707-D9CF-40AE-B4C6-C98DA3205C09}" type="datetimeFigureOut">
               <a:rPr lang="en-US" smtClean="0"/>
               <a:pPr/>
-              <a:t>7/3/2026</a:t>
+              <a:t>7/10/2026</a:t>
             </a:fld>
             <a:endParaRPr lang="en-US"/>
           </a:p>
@@ -666,7 +666,7 @@
             <a:fld id="{1D8BD707-D9CF-40AE-B4C6-C98DA3205C09}" type="datetimeFigureOut">
               <a:rPr lang="en-US" smtClean="0"/>
               <a:pPr/>
-              <a:t>7/3/2026</a:t>
+              <a:t>7/10/2026</a:t>
             </a:fld>
             <a:endParaRPr lang="en-US"/>
           </a:p>
@@ -831,7 +831,7 @@
             <a:fld id="{1D8BD707-D9CF-40AE-B4C6-C98DA3205C09}" type="datetimeFigureOut">
               <a:rPr lang="en-US" smtClean="0"/>
               <a:pPr/>
-              <a:t>7/3/2026</a:t>
+              <a:t>7/10/2026</a:t>
             </a:fld>
             <a:endParaRPr lang="en-US"/>
           </a:p>
@@ -1073,7 +1073,7 @@
             <a:fld id="{1D8BD707-D9CF-40AE-B4C6-C98DA3205C09}" type="datetimeFigureOut">
               <a:rPr lang="en-US" smtClean="0"/>
               <a:pPr/>
-              <a:t>7/3/2026</a:t>
+              <a:t>7/10/2026</a:t>
             </a:fld>
             <a:endParaRPr lang="en-US"/>
           </a:p>
@@ -1355,7 +1355,7 @@
             <a:fld id="{1D8BD707-D9CF-40AE-B4C6-C98DA3205C09}" type="datetimeFigureOut">
               <a:rPr lang="en-US" smtClean="0"/>
               <a:pPr/>
-              <a:t>7/3/2026</a:t>
+              <a:t>7/10/2026</a:t>
             </a:fld>
             <a:endParaRPr lang="en-US"/>
           </a:p>
@@ -1771,7 +1771,7 @@
             <a:fld id="{1D8BD707-D9CF-40AE-B4C6-C98DA3205C09}" type="datetimeFigureOut">
               <a:rPr lang="en-US" smtClean="0"/>
               <a:pPr/>
-              <a:t>7/3/2026</a:t>
+              <a:t>7/10/2026</a:t>
             </a:fld>
             <a:endParaRPr lang="en-US"/>
           </a:p>
@@ -1885,7 +1885,7 @@
             <a:fld id="{1D8BD707-D9CF-40AE-B4C6-C98DA3205C09}" type="datetimeFigureOut">
               <a:rPr lang="en-US" smtClean="0"/>
               <a:pPr/>
-              <a:t>7/3/2026</a:t>
+              <a:t>7/10/2026</a:t>
             </a:fld>
             <a:endParaRPr lang="en-US"/>
           </a:p>
@@ -1977,7 +1977,7 @@
             <a:fld id="{1D8BD707-D9CF-40AE-B4C6-C98DA3205C09}" type="datetimeFigureOut">
               <a:rPr lang="en-US" smtClean="0"/>
               <a:pPr/>
-              <a:t>7/3/2026</a:t>
+              <a:t>7/10/2026</a:t>
             </a:fld>
             <a:endParaRPr lang="en-US"/>
           </a:p>
@@ -2249,7 +2249,7 @@
             <a:fld id="{1D8BD707-D9CF-40AE-B4C6-C98DA3205C09}" type="datetimeFigureOut">
               <a:rPr lang="en-US" smtClean="0"/>
               <a:pPr/>
-              <a:t>7/3/2026</a:t>
+              <a:t>7/10/2026</a:t>
             </a:fld>
             <a:endParaRPr lang="en-US"/>
           </a:p>
@@ -2498,7 +2498,7 @@
             <a:fld id="{1D8BD707-D9CF-40AE-B4C6-C98DA3205C09}" type="datetimeFigureOut">
               <a:rPr lang="en-US" smtClean="0"/>
               <a:pPr/>
-              <a:t>7/3/2026</a:t>
+              <a:t>7/10/2026</a:t>
             </a:fld>
             <a:endParaRPr lang="en-US"/>
           </a:p>
@@ -2706,7 +2706,7 @@
             <a:fld id="{1D8BD707-D9CF-40AE-B4C6-C98DA3205C09}" type="datetimeFigureOut">
               <a:rPr lang="en-US" smtClean="0"/>
               <a:pPr/>
-              <a:t>7/3/2026</a:t>
+              <a:t>7/10/2026</a:t>
             </a:fld>
             <a:endParaRPr lang="en-US"/>
           </a:p>
@@ -5021,7 +5021,7 @@
         <p:spPr/>
         <p:txBody>
           <a:bodyPr>
-            <a:normAutofit fontScale="92500"/>
+            <a:normAutofit/>
           </a:bodyPr>
           <a:lstStyle/>
           <a:p>
@@ -5071,6 +5071,7 @@
             </a:r>
           </a:p>
           <a:p>
+            <a:pPr lvl="1"/>
             <a:r>
               <a:rPr lang="en-US" dirty="0"/>
               <a:t>Create a class </a:t>
